--- a/Multi-Agent-Deep-Research.pptx
+++ b/Multi-Agent-Deep-Research.pptx
@@ -2483,7 +2483,7 @@
                 <a:ea typeface="Calibri" pitchFamily="34" charset="-122"/>
                 <a:cs typeface="Calibri" pitchFamily="34" charset="-120"/>
               </a:rPr>
-              <a:t>Asked these questions directly, a frontier LLM cited 37 URLs — 13 of them dead.</a:t>
+              <a:t>Asked these questions directly, a frontier LLM cited 35 URLs — 12 of them dead.</a:t>
             </a:r>
             <a:endParaRPr lang="en-US" sz="1250" dirty="0"/>
           </a:p>
@@ -4587,7 +4587,7 @@
                 <a:ea typeface="Calibri" pitchFamily="34" charset="-122"/>
                 <a:cs typeface="Calibri" pitchFamily="34" charset="-120"/>
               </a:rPr>
-              <a:t>The reporter is given only what the retriever actually fetched, so every citation resolves to a retrieved source. Measured over 6 live queries: 12 sources per report, 54 of 54 citations grounded, 92.6% of URLs live.</a:t>
+              <a:t>The reporter is given only what the retriever actually fetched. Measured over 6 live queries: 17 sources per report, 62 of 64 citations grounded in a retrieved source, and every cited URL resolves.</a:t>
             </a:r>
             <a:endParaRPr lang="en-US" sz="1400" dirty="0"/>
           </a:p>
@@ -7167,7 +7167,7 @@
                 <a:ea typeface="Calibri" pitchFamily="34" charset="-122"/>
                 <a:cs typeface="Calibri" pitchFamily="34" charset="-120"/>
               </a:rPr>
-              <a:t>6 queries, 25 Jul 2026. Baseline: Claude Sonnet 4.5, one prompt, no retrieval.</a:t>
+              <a:t>6 queries, 26 Jul 2026 · 48.6 s mean per report. Baseline: Claude Sonnet 4.5, no retrieval.</a:t>
             </a:r>
             <a:endParaRPr lang="en-US" sz="1000" dirty="0"/>
           </a:p>
@@ -7233,7 +7233,7 @@
                 <a:ea typeface="Cambria" pitchFamily="34" charset="-122"/>
                 <a:cs typeface="Cambria" pitchFamily="34" charset="-120"/>
               </a:rPr>
-              <a:t>6.2 s</a:t>
+              <a:t>96.9%</a:t>
             </a:r>
             <a:endParaRPr lang="en-US" sz="3400" dirty="0"/>
           </a:p>
@@ -7272,7 +7272,7 @@
                 <a:ea typeface="Calibri" pitchFamily="34" charset="-122"/>
                 <a:cs typeface="Calibri" pitchFamily="34" charset="-120"/>
               </a:rPr>
-              <a:t>to produce a cited report</a:t>
+              <a:t>of citations grounded</a:t>
             </a:r>
             <a:endParaRPr lang="en-US" sz="1250" dirty="0"/>
           </a:p>
@@ -7311,7 +7311,7 @@
                 <a:ea typeface="Calibri" pitchFamily="34" charset="-122"/>
                 <a:cs typeface="Calibri" pitchFamily="34" charset="-120"/>
               </a:rPr>
-              <a:t>vs. 20.1 s single LLM</a:t>
+              <a:t>62 of 64 · vs. 0% single LLM</a:t>
             </a:r>
             <a:endParaRPr lang="en-US" sz="1050" dirty="0"/>
           </a:p>
@@ -7377,7 +7377,7 @@
                 <a:ea typeface="Cambria" pitchFamily="34" charset="-122"/>
                 <a:cs typeface="Cambria" pitchFamily="34" charset="-120"/>
               </a:rPr>
-              <a:t>100%</a:t>
+              <a:t>17</a:t>
             </a:r>
             <a:endParaRPr lang="en-US" sz="3400" dirty="0"/>
           </a:p>
@@ -7416,7 +7416,7 @@
                 <a:ea typeface="Calibri" pitchFamily="34" charset="-122"/>
                 <a:cs typeface="Calibri" pitchFamily="34" charset="-120"/>
               </a:rPr>
-              <a:t>of citations grounded</a:t>
+              <a:t>sources per report</a:t>
             </a:r>
             <a:endParaRPr lang="en-US" sz="1250" dirty="0"/>
           </a:p>
@@ -7455,7 +7455,7 @@
                 <a:ea typeface="Calibri" pitchFamily="34" charset="-122"/>
                 <a:cs typeface="Calibri" pitchFamily="34" charset="-120"/>
               </a:rPr>
-              <a:t>vs. 0% single LLM</a:t>
+              <a:t>6 web · 5 papers · 6 news</a:t>
             </a:r>
             <a:endParaRPr lang="en-US" sz="1050" dirty="0"/>
           </a:p>
@@ -7521,7 +7521,7 @@
                 <a:ea typeface="Cambria" pitchFamily="34" charset="-122"/>
                 <a:cs typeface="Cambria" pitchFamily="34" charset="-120"/>
               </a:rPr>
-              <a:t>92.6%</a:t>
+              <a:t>100%</a:t>
             </a:r>
             <a:endParaRPr lang="en-US" sz="3400" dirty="0"/>
           </a:p>
@@ -7599,7 +7599,7 @@
                 <a:ea typeface="Calibri" pitchFamily="34" charset="-122"/>
                 <a:cs typeface="Calibri" pitchFamily="34" charset="-120"/>
               </a:rPr>
-              <a:t>vs. 64.9% single LLM</a:t>
+              <a:t>vs. 65.7% single LLM</a:t>
             </a:r>
             <a:endParaRPr lang="en-US" sz="1050" dirty="0"/>
           </a:p>
@@ -7892,7 +7892,7 @@
                 <a:ea typeface="Calibri" pitchFamily="34" charset="-122"/>
                 <a:cs typeface="Calibri" pitchFamily="34" charset="-120"/>
               </a:rPr>
-              <a:t>The same questions put to one frontier LLM produced 0% grounded citations, 35% dead links.</a:t>
+              <a:t>The same questions put to one frontier LLM produced 0% grounded citations and a third dead links.</a:t>
             </a:r>
             <a:endParaRPr lang="en-US" sz="1400" dirty="0"/>
           </a:p>
@@ -8022,7 +8022,7 @@
                 <a:ea typeface="Calibri" pitchFamily="34" charset="-122"/>
                 <a:cs typeface="Calibri" pitchFamily="34" charset="-120"/>
               </a:rPr>
-              <a:t>Analysis falls back to heuristics if the analyzer model is unreachable, silently.</a:t>
+              <a:t>Verification costs latency: 48.6 s per report against 20 s for a single model.</a:t>
             </a:r>
             <a:endParaRPr lang="en-US" sz="1400" dirty="0"/>
           </a:p>
